--- a/doc/architecture.pptx
+++ b/doc/architecture.pptx
@@ -208,6 +208,29 @@
     </p:extLst>
   </p:cmAuthor>
 </p:cmAuthorLst>
+</file>
+
+<file path=ppt/comments/modernComment_57F_2E5579E7.xml><?xml version="1.0" encoding="utf-8"?>
+<p188:cmLst xmlns:a="http://schemas.openxmlformats.org/drawingml/2006/main" xmlns:r="http://schemas.openxmlformats.org/officeDocument/2006/relationships" xmlns:p188="http://schemas.microsoft.com/office/powerpoint/2018/8/main">
+  <p188:cm id="{55092677-D017-4272-BA05-B5AD5EB8D378}" authorId="{D189D656-8E02-B9F1-10F5-52BD840A97A1}" created="2026-09-11T07:24:50.415">
+    <ac:deMkLst xmlns:ac="http://schemas.microsoft.com/office/drawing/2013/main/command">
+      <pc:docMk xmlns:pc="http://schemas.microsoft.com/office/powerpoint/2013/main/command"/>
+      <pc:sldMk xmlns:pc="http://schemas.microsoft.com/office/powerpoint/2013/main/command" cId="777353703" sldId="1407"/>
+      <ac:spMk id="34" creationId="{5B6E46C9-56C8-F21E-1BA4-D5E4FEFC31A9}"/>
+    </ac:deMkLst>
+    <p188:txBody>
+      <a:bodyPr/>
+      <a:lstStyle/>
+      <a:p>
+        <a:r>
+          <a:rPr lang="de-DE"/>
+          <a:t>Server side OCR of image-only PDF text,
+„headless browser“</a:t>
+        </a:r>
+      </a:p>
+    </p188:txBody>
+  </p188:cm>
+</p188:cmLst>
 </file>
 
 <file path=ppt/handoutMasters/handoutMaster1.xml><?xml version="1.0" encoding="utf-8"?>
@@ -6205,7 +6228,7 @@
             </a:pPr>
             <a:r>
               <a:rPr lang="en-GB" sz="2400" i="1" dirty="0"/>
-              <a:t>~Weekly </a:t>
+              <a:t>~biweekly </a:t>
             </a:r>
             <a:r>
               <a:rPr lang="en-GB" sz="2400" dirty="0"/>
@@ -6232,7 +6255,7 @@
             </a:pPr>
             <a:r>
               <a:rPr lang="en-GB" sz="2400" dirty="0"/>
-              <a:t>Editorials towards board decisions</a:t>
+              <a:t>Editorials on council decisions</a:t>
             </a:r>
           </a:p>
           <a:p>
@@ -6242,7 +6265,7 @@
             </a:pPr>
             <a:r>
               <a:rPr lang="en-GB" sz="2400" dirty="0"/>
-              <a:t>Editorials around academic research</a:t>
+              <a:t>Editorials on academic research</a:t>
             </a:r>
           </a:p>
           <a:p>
@@ -6381,6 +6404,55 @@
             <a:endParaRPr lang="en-GB" sz="2400" noProof="0" dirty="0"/>
           </a:p>
           <a:p>
+            <a:pPr marL="792163" lvl="1" indent="-342900">
+              <a:buFont typeface="Arial" panose="020B0604020202020204" pitchFamily="34" charset="0"/>
+              <a:buChar char="•"/>
+            </a:pPr>
+            <a:r>
+              <a:rPr lang="en-GB" sz="2400" dirty="0"/>
+              <a:t>S</a:t>
+            </a:r>
+            <a:r>
+              <a:rPr lang="en-GB" sz="2400" noProof="0" dirty="0" err="1"/>
+              <a:t>ubdomain</a:t>
+            </a:r>
+            <a:r>
+              <a:rPr lang="en-GB" sz="2400" noProof="0" dirty="0"/>
+              <a:t> of ZEW Institute, hosted at ZEW Institute</a:t>
+            </a:r>
+          </a:p>
+          <a:p>
+            <a:pPr marL="792163" lvl="1" indent="-342900">
+              <a:buFont typeface="Arial" panose="020B0604020202020204" pitchFamily="34" charset="0"/>
+              <a:buChar char="•"/>
+            </a:pPr>
+            <a:r>
+              <a:rPr lang="en-GB" sz="2400" dirty="0"/>
+              <a:t>Separate webserver, hosted at ZEW institute, at “DMZ”</a:t>
+            </a:r>
+            <a:endParaRPr lang="en-GB" sz="2400" noProof="0" dirty="0"/>
+          </a:p>
+          <a:p>
+            <a:pPr marL="792163" lvl="1" indent="-342900">
+              <a:buFont typeface="Arial" panose="020B0604020202020204" pitchFamily="34" charset="0"/>
+              <a:buChar char="•"/>
+            </a:pPr>
+            <a:r>
+              <a:rPr lang="en-GB" sz="2400" dirty="0"/>
+              <a:t>ZEW corporate design – cooperation with KOM</a:t>
+            </a:r>
+          </a:p>
+          <a:p>
+            <a:pPr marL="792163" lvl="1" indent="-342900">
+              <a:buFont typeface="Arial" panose="020B0604020202020204" pitchFamily="34" charset="0"/>
+              <a:buChar char="•"/>
+            </a:pPr>
+            <a:r>
+              <a:rPr lang="en-GB" sz="2400" dirty="0"/>
+              <a:t>Illustrations via behance.net</a:t>
+            </a:r>
+          </a:p>
+          <a:p>
             <a:pPr marL="342900" indent="-342900">
               <a:lnSpc>
                 <a:spcPct val="100000"/>
@@ -6390,15 +6462,7 @@
             </a:pPr>
             <a:r>
               <a:rPr lang="en-GB" sz="2400" dirty="0"/>
-              <a:t>S</a:t>
-            </a:r>
-            <a:r>
-              <a:rPr lang="en-GB" sz="2400" noProof="0" dirty="0" err="1"/>
-              <a:t>ubdomain</a:t>
-            </a:r>
-            <a:r>
-              <a:rPr lang="en-GB" sz="2400" noProof="0" dirty="0"/>
-              <a:t> of ZEW Institute, hosted at ZEW Institute</a:t>
+              <a:t>Separate visitor statistics – no cookies</a:t>
             </a:r>
           </a:p>
           <a:p>
@@ -6411,47 +6475,7 @@
             </a:pPr>
             <a:r>
               <a:rPr lang="en-GB" sz="2400" dirty="0"/>
-              <a:t>Separate webserver, hosted at ZEW institute, at “DMZ”</a:t>
-            </a:r>
-            <a:endParaRPr lang="en-GB" sz="2400" noProof="0" dirty="0"/>
-          </a:p>
-          <a:p>
-            <a:pPr marL="342900" indent="-342900">
-              <a:lnSpc>
-                <a:spcPct val="100000"/>
-              </a:lnSpc>
-              <a:buFont typeface="Arial" panose="020B0604020202020204" pitchFamily="34" charset="0"/>
-              <a:buChar char="•"/>
-            </a:pPr>
-            <a:r>
-              <a:rPr lang="en-GB" sz="2400" dirty="0"/>
-              <a:t>ZEW corporate design – cooperation with KOM</a:t>
-            </a:r>
-          </a:p>
-          <a:p>
-            <a:pPr marL="342900" indent="-342900">
-              <a:lnSpc>
-                <a:spcPct val="100000"/>
-              </a:lnSpc>
-              <a:buFont typeface="Arial" panose="020B0604020202020204" pitchFamily="34" charset="0"/>
-              <a:buChar char="•"/>
-            </a:pPr>
-            <a:r>
-              <a:rPr lang="en-GB" sz="2400" dirty="0"/>
-              <a:t>Separate visitor statistics – no cookies</a:t>
-            </a:r>
-          </a:p>
-          <a:p>
-            <a:pPr marL="342900" indent="-342900">
-              <a:lnSpc>
-                <a:spcPct val="100000"/>
-              </a:lnSpc>
-              <a:buFont typeface="Arial" panose="020B0604020202020204" pitchFamily="34" charset="0"/>
-              <a:buChar char="•"/>
-            </a:pPr>
-            <a:r>
-              <a:rPr lang="en-GB" sz="2400" dirty="0"/>
-              <a:t>Based 100% on Open-Source software</a:t>
+              <a:t>100% Open-Source software</a:t>
             </a:r>
           </a:p>
           <a:p>
@@ -11817,6 +11841,41 @@
           </a:p>
         </p:txBody>
       </p:sp>
+      <p:sp>
+        <p:nvSpPr>
+          <p:cNvPr id="34" name="Textfeld 33">
+            <a:extLst>
+              <a:ext uri="{FF2B5EF4-FFF2-40B4-BE49-F238E27FC236}">
+                <a16:creationId xmlns:a16="http://schemas.microsoft.com/office/drawing/2014/main" id="{5B6E46C9-56C8-F21E-1BA4-D5E4FEFC31A9}"/>
+              </a:ext>
+            </a:extLst>
+          </p:cNvPr>
+          <p:cNvSpPr txBox="1"/>
+          <p:nvPr/>
+        </p:nvSpPr>
+        <p:spPr>
+          <a:xfrm>
+            <a:off x="9648497" y="4403834"/>
+            <a:ext cx="65" cy="276999"/>
+          </a:xfrm>
+          <a:prstGeom prst="rect">
+            <a:avLst/>
+          </a:prstGeom>
+          <a:noFill/>
+        </p:spPr>
+        <p:txBody>
+          <a:bodyPr wrap="none" lIns="0" tIns="0" rIns="0" bIns="0" rtlCol="0">
+            <a:spAutoFit/>
+          </a:bodyPr>
+          <a:lstStyle/>
+          <a:p>
+            <a:endParaRPr lang="de-DE" dirty="0" err="1">
+              <a:latin typeface="Arial" panose="020B0604020202020204" pitchFamily="34" charset="0"/>
+              <a:cs typeface="Arial" panose="020B0604020202020204" pitchFamily="34" charset="0"/>
+            </a:endParaRPr>
+          </a:p>
+        </p:txBody>
+      </p:sp>
     </p:spTree>
     <p:extLst>
       <p:ext uri="{BB962C8B-B14F-4D97-AF65-F5344CB8AC3E}">
@@ -11827,6 +11886,11 @@
   <p:clrMapOvr>
     <a:masterClrMapping/>
   </p:clrMapOvr>
+  <p:extLst>
+    <p:ext uri="{6950BFC3-D8DA-4A85-94F7-54DA5524770B}">
+      <p188:commentRel xmlns:p188="http://schemas.microsoft.com/office/powerpoint/2018/8/main" r:id="rId3"/>
+    </p:ext>
+  </p:extLst>
 </p:sld>
 </file>
 
